--- a/Slides/00 Outline.pptx
+++ b/Slides/00 Outline.pptx
@@ -8,6 +8,7 @@
     <p:sldId id="256" r:id="rId2"/>
     <p:sldId id="257" r:id="rId3"/>
     <p:sldId id="258" r:id="rId4"/>
+    <p:sldId id="259" r:id="rId5"/>
   </p:sldIdLst>
   <p:sldSz cx="12192000" cy="6858000"/>
   <p:notesSz cx="6858000" cy="9144000"/>
@@ -117,7 +118,7 @@
 <file path=ppt/revisionInfo.xml><?xml version="1.0" encoding="utf-8"?>
 <p1510:revInfo xmlns:a="http://schemas.openxmlformats.org/drawingml/2006/main" xmlns:r="http://schemas.openxmlformats.org/officeDocument/2006/relationships" xmlns:p1510="http://schemas.microsoft.com/office/powerpoint/2015/10/main">
   <p1510:revLst>
-    <p1510:client id="{AF93CB8E-3CF2-4FC1-B7F9-03A795394BE8}" v="3" dt="2026-09-18T14:42:35.291"/>
+    <p1510:client id="{233A576E-97D1-4EF0-80F3-D175BE30CAF8}" v="2" dt="2026-09-24T15:50:27.295"/>
   </p1510:revLst>
 </p1510:revInfo>
 </file>
@@ -126,8 +127,8 @@
 <pc:chgInfo xmlns:a="http://schemas.openxmlformats.org/drawingml/2006/main" xmlns:r="http://schemas.openxmlformats.org/officeDocument/2006/relationships" xmlns:ac="http://schemas.microsoft.com/office/drawing/2013/main/command" xmlns:pc="http://schemas.microsoft.com/office/powerpoint/2013/main/command">
   <pc:docChgLst>
     <pc:chgData name="Francesco Bellotti" userId="f453232b-f87d-4756-9d8b-c09bc835cc42" providerId="ADAL" clId="{C7FEA3FA-4936-41E1-B7FA-CA082069F7F7}"/>
-    <pc:docChg chg="addSld modSld">
-      <pc:chgData name="Francesco Bellotti" userId="f453232b-f87d-4756-9d8b-c09bc835cc42" providerId="ADAL" clId="{C7FEA3FA-4936-41E1-B7FA-CA082069F7F7}" dt="2026-09-18T14:42:35.291" v="52"/>
+    <pc:docChg chg="custSel addSld modSld">
+      <pc:chgData name="Francesco Bellotti" userId="f453232b-f87d-4756-9d8b-c09bc835cc42" providerId="ADAL" clId="{C7FEA3FA-4936-41E1-B7FA-CA082069F7F7}" dt="2026-09-24T15:50:55.672" v="87" actId="3626"/>
       <pc:docMkLst>
         <pc:docMk/>
       </pc:docMkLst>
@@ -143,6 +144,29 @@
             <pc:docMk/>
             <pc:sldMk cId="3323268094" sldId="258"/>
             <ac:spMk id="3" creationId="{98FC7821-5DB6-52F8-D305-68E38BEEDBB6}"/>
+          </ac:spMkLst>
+        </pc:spChg>
+      </pc:sldChg>
+      <pc:sldChg chg="modSp new mod">
+        <pc:chgData name="Francesco Bellotti" userId="f453232b-f87d-4756-9d8b-c09bc835cc42" providerId="ADAL" clId="{C7FEA3FA-4936-41E1-B7FA-CA082069F7F7}" dt="2026-09-24T15:50:55.672" v="87" actId="3626"/>
+        <pc:sldMkLst>
+          <pc:docMk/>
+          <pc:sldMk cId="2309632616" sldId="259"/>
+        </pc:sldMkLst>
+        <pc:spChg chg="mod">
+          <ac:chgData name="Francesco Bellotti" userId="f453232b-f87d-4756-9d8b-c09bc835cc42" providerId="ADAL" clId="{C7FEA3FA-4936-41E1-B7FA-CA082069F7F7}" dt="2026-09-24T15:50:35.062" v="68" actId="20577"/>
+          <ac:spMkLst>
+            <pc:docMk/>
+            <pc:sldMk cId="2309632616" sldId="259"/>
+            <ac:spMk id="2" creationId="{F9C59D14-D3DC-97B8-0123-86CF69C2CC93}"/>
+          </ac:spMkLst>
+        </pc:spChg>
+        <pc:spChg chg="mod">
+          <ac:chgData name="Francesco Bellotti" userId="f453232b-f87d-4756-9d8b-c09bc835cc42" providerId="ADAL" clId="{C7FEA3FA-4936-41E1-B7FA-CA082069F7F7}" dt="2026-09-24T15:50:55.672" v="87" actId="3626"/>
+          <ac:spMkLst>
+            <pc:docMk/>
+            <pc:sldMk cId="2309632616" sldId="259"/>
+            <ac:spMk id="3" creationId="{9E82E6F9-3045-7055-34F2-DAB8F44F7DAC}"/>
           </ac:spMkLst>
         </pc:spChg>
       </pc:sldChg>
@@ -929,7 +953,7 @@
           <a:p>
             <a:fld id="{112C68EF-6A95-4610-9F8C-A6476DB60E5A}" type="datetimeFigureOut">
               <a:rPr lang="en-GB" smtClean="0"/>
-              <a:t>18/09/2026</a:t>
+              <a:t>24/09/2026</a:t>
             </a:fld>
             <a:endParaRPr lang="en-GB"/>
           </a:p>
@@ -1180,7 +1204,7 @@
           <a:p>
             <a:fld id="{112C68EF-6A95-4610-9F8C-A6476DB60E5A}" type="datetimeFigureOut">
               <a:rPr lang="en-GB" smtClean="0"/>
-              <a:t>18/09/2026</a:t>
+              <a:t>24/09/2026</a:t>
             </a:fld>
             <a:endParaRPr lang="en-GB"/>
           </a:p>
@@ -1494,7 +1518,7 @@
           <a:p>
             <a:fld id="{112C68EF-6A95-4610-9F8C-A6476DB60E5A}" type="datetimeFigureOut">
               <a:rPr lang="en-GB" smtClean="0"/>
-              <a:t>18/09/2026</a:t>
+              <a:t>24/09/2026</a:t>
             </a:fld>
             <a:endParaRPr lang="en-GB"/>
           </a:p>
@@ -1835,7 +1859,7 @@
           <a:p>
             <a:fld id="{112C68EF-6A95-4610-9F8C-A6476DB60E5A}" type="datetimeFigureOut">
               <a:rPr lang="en-GB" smtClean="0"/>
-              <a:t>18/09/2026</a:t>
+              <a:t>24/09/2026</a:t>
             </a:fld>
             <a:endParaRPr lang="en-GB"/>
           </a:p>
@@ -2149,7 +2173,7 @@
           <a:p>
             <a:fld id="{112C68EF-6A95-4610-9F8C-A6476DB60E5A}" type="datetimeFigureOut">
               <a:rPr lang="en-GB" smtClean="0"/>
-              <a:t>18/09/2026</a:t>
+              <a:t>24/09/2026</a:t>
             </a:fld>
             <a:endParaRPr lang="en-GB"/>
           </a:p>
@@ -2542,7 +2566,7 @@
           <a:p>
             <a:fld id="{112C68EF-6A95-4610-9F8C-A6476DB60E5A}" type="datetimeFigureOut">
               <a:rPr lang="en-GB" smtClean="0"/>
-              <a:t>18/09/2026</a:t>
+              <a:t>24/09/2026</a:t>
             </a:fld>
             <a:endParaRPr lang="en-GB"/>
           </a:p>
@@ -2712,7 +2736,7 @@
           <a:p>
             <a:fld id="{112C68EF-6A95-4610-9F8C-A6476DB60E5A}" type="datetimeFigureOut">
               <a:rPr lang="en-GB" smtClean="0"/>
-              <a:t>18/09/2026</a:t>
+              <a:t>24/09/2026</a:t>
             </a:fld>
             <a:endParaRPr lang="en-GB"/>
           </a:p>
@@ -2892,7 +2916,7 @@
           <a:p>
             <a:fld id="{112C68EF-6A95-4610-9F8C-A6476DB60E5A}" type="datetimeFigureOut">
               <a:rPr lang="en-GB" smtClean="0"/>
-              <a:t>18/09/2026</a:t>
+              <a:t>24/09/2026</a:t>
             </a:fld>
             <a:endParaRPr lang="en-GB"/>
           </a:p>
@@ -3068,7 +3092,7 @@
           <a:p>
             <a:fld id="{112C68EF-6A95-4610-9F8C-A6476DB60E5A}" type="datetimeFigureOut">
               <a:rPr lang="en-GB" smtClean="0"/>
-              <a:t>18/09/2026</a:t>
+              <a:t>24/09/2026</a:t>
             </a:fld>
             <a:endParaRPr lang="en-GB"/>
           </a:p>
@@ -3315,7 +3339,7 @@
           <a:p>
             <a:fld id="{112C68EF-6A95-4610-9F8C-A6476DB60E5A}" type="datetimeFigureOut">
               <a:rPr lang="en-GB" smtClean="0"/>
-              <a:t>18/09/2026</a:t>
+              <a:t>24/09/2026</a:t>
             </a:fld>
             <a:endParaRPr lang="en-GB"/>
           </a:p>
@@ -3547,7 +3571,7 @@
           <a:p>
             <a:fld id="{112C68EF-6A95-4610-9F8C-A6476DB60E5A}" type="datetimeFigureOut">
               <a:rPr lang="en-GB" smtClean="0"/>
-              <a:t>18/09/2026</a:t>
+              <a:t>24/09/2026</a:t>
             </a:fld>
             <a:endParaRPr lang="en-GB"/>
           </a:p>
@@ -3921,7 +3945,7 @@
           <a:p>
             <a:fld id="{112C68EF-6A95-4610-9F8C-A6476DB60E5A}" type="datetimeFigureOut">
               <a:rPr lang="en-GB" smtClean="0"/>
-              <a:t>18/09/2026</a:t>
+              <a:t>24/09/2026</a:t>
             </a:fld>
             <a:endParaRPr lang="en-GB"/>
           </a:p>
@@ -4044,7 +4068,7 @@
           <a:p>
             <a:fld id="{112C68EF-6A95-4610-9F8C-A6476DB60E5A}" type="datetimeFigureOut">
               <a:rPr lang="en-GB" smtClean="0"/>
-              <a:t>18/09/2026</a:t>
+              <a:t>24/09/2026</a:t>
             </a:fld>
             <a:endParaRPr lang="en-GB"/>
           </a:p>
@@ -4139,7 +4163,7 @@
           <a:p>
             <a:fld id="{112C68EF-6A95-4610-9F8C-A6476DB60E5A}" type="datetimeFigureOut">
               <a:rPr lang="en-GB" smtClean="0"/>
-              <a:t>18/09/2026</a:t>
+              <a:t>24/09/2026</a:t>
             </a:fld>
             <a:endParaRPr lang="en-GB"/>
           </a:p>
@@ -4394,7 +4418,7 @@
           <a:p>
             <a:fld id="{112C68EF-6A95-4610-9F8C-A6476DB60E5A}" type="datetimeFigureOut">
               <a:rPr lang="en-GB" smtClean="0"/>
-              <a:t>18/09/2026</a:t>
+              <a:t>24/09/2026</a:t>
             </a:fld>
             <a:endParaRPr lang="en-GB"/>
           </a:p>
@@ -4657,7 +4681,7 @@
           <a:p>
             <a:fld id="{112C68EF-6A95-4610-9F8C-A6476DB60E5A}" type="datetimeFigureOut">
               <a:rPr lang="en-GB" smtClean="0"/>
-              <a:t>18/09/2026</a:t>
+              <a:t>24/09/2026</a:t>
             </a:fld>
             <a:endParaRPr lang="en-GB"/>
           </a:p>
@@ -5456,7 +5480,7 @@
           <a:p>
             <a:fld id="{112C68EF-6A95-4610-9F8C-A6476DB60E5A}" type="datetimeFigureOut">
               <a:rPr lang="en-GB" smtClean="0"/>
-              <a:t>18/09/2026</a:t>
+              <a:t>24/09/2026</a:t>
             </a:fld>
             <a:endParaRPr lang="en-GB"/>
           </a:p>
@@ -6336,6 +6360,116 @@
 </p:sld>
 </file>
 
+<file path=ppt/slides/slide4.xml><?xml version="1.0" encoding="utf-8"?>
+<p:sld xmlns:a="http://schemas.openxmlformats.org/drawingml/2006/main" xmlns:r="http://schemas.openxmlformats.org/officeDocument/2006/relationships" xmlns:p="http://schemas.openxmlformats.org/presentationml/2006/main">
+  <p:cSld>
+    <p:spTree>
+      <p:nvGrpSpPr>
+        <p:cNvPr id="1" name=""/>
+        <p:cNvGrpSpPr/>
+        <p:nvPr/>
+      </p:nvGrpSpPr>
+      <p:grpSpPr>
+        <a:xfrm>
+          <a:off x="0" y="0"/>
+          <a:ext cx="0" cy="0"/>
+          <a:chOff x="0" y="0"/>
+          <a:chExt cx="0" cy="0"/>
+        </a:xfrm>
+      </p:grpSpPr>
+      <p:sp>
+        <p:nvSpPr>
+          <p:cNvPr id="2" name="Titolo 1">
+            <a:extLst>
+              <a:ext uri="{FF2B5EF4-FFF2-40B4-BE49-F238E27FC236}">
+                <a16:creationId xmlns:a16="http://schemas.microsoft.com/office/drawing/2014/main" id="{F9C59D14-D3DC-97B8-0123-86CF69C2CC93}"/>
+              </a:ext>
+            </a:extLst>
+          </p:cNvPr>
+          <p:cNvSpPr>
+            <a:spLocks noGrp="1"/>
+          </p:cNvSpPr>
+          <p:nvPr>
+            <p:ph type="title"/>
+          </p:nvPr>
+        </p:nvSpPr>
+        <p:spPr/>
+        <p:txBody>
+          <a:bodyPr/>
+          <a:lstStyle/>
+          <a:p>
+            <a:r>
+              <a:rPr lang="it-IT" dirty="0" err="1"/>
+              <a:t>Resources</a:t>
+            </a:r>
+            <a:endParaRPr lang="en-GB" dirty="0"/>
+          </a:p>
+        </p:txBody>
+      </p:sp>
+      <p:sp>
+        <p:nvSpPr>
+          <p:cNvPr id="3" name="Segnaposto contenuto 2">
+            <a:extLst>
+              <a:ext uri="{FF2B5EF4-FFF2-40B4-BE49-F238E27FC236}">
+                <a16:creationId xmlns:a16="http://schemas.microsoft.com/office/drawing/2014/main" id="{9E82E6F9-3045-7055-34F2-DAB8F44F7DAC}"/>
+              </a:ext>
+            </a:extLst>
+          </p:cNvPr>
+          <p:cNvSpPr>
+            <a:spLocks noGrp="1"/>
+          </p:cNvSpPr>
+          <p:nvPr>
+            <p:ph idx="1"/>
+          </p:nvPr>
+        </p:nvSpPr>
+        <p:spPr/>
+        <p:txBody>
+          <a:bodyPr/>
+          <a:lstStyle/>
+          <a:p>
+            <a:r>
+              <a:rPr lang="en-GB" dirty="0">
+                <a:solidFill>
+                  <a:schemeClr val="tx1"/>
+                </a:solidFill>
+              </a:rPr>
+              <a:t>Course material: </a:t>
+            </a:r>
+            <a:r>
+              <a:rPr lang="en-GB" dirty="0">
+                <a:solidFill>
+                  <a:srgbClr val="99CA3C"/>
+                </a:solidFill>
+                <a:hlinkClick r:id="rId2">
+                  <a:extLst>
+                    <a:ext uri="{A12FA001-AC4F-418D-AE19-62706E023703}">
+                      <ahyp:hlinkClr xmlns:ahyp="http://schemas.microsoft.com/office/drawing/2018/hyperlinkcolor" val="tx"/>
+                    </a:ext>
+                  </a:extLst>
+                </a:hlinkClick>
+              </a:rPr>
+              <a:t>https://github.com/FranzGH/timeseries</a:t>
+            </a:r>
+            <a:r>
+              <a:rPr lang="en-GB" dirty="0"/>
+              <a:t> </a:t>
+            </a:r>
+          </a:p>
+        </p:txBody>
+      </p:sp>
+    </p:spTree>
+    <p:extLst>
+      <p:ext uri="{BB962C8B-B14F-4D97-AF65-F5344CB8AC3E}">
+        <p14:creationId xmlns:p14="http://schemas.microsoft.com/office/powerpoint/2010/main" val="2309632616"/>
+      </p:ext>
+    </p:extLst>
+  </p:cSld>
+  <p:clrMapOvr>
+    <a:masterClrMapping/>
+  </p:clrMapOvr>
+</p:sld>
+</file>
+
 <file path=ppt/theme/theme1.xml><?xml version="1.0" encoding="utf-8"?>
 <a:theme xmlns:a="http://schemas.openxmlformats.org/drawingml/2006/main" name="Sfaccettatura">
   <a:themeElements>
